--- a/04_lambda.pptx
+++ b/04_lambda.pptx
@@ -279,7 +279,7 @@
           <a:p>
             <a:fld id="{7952453C-A5FB-4FDE-A708-76FC0F8C47D7}" type="datetimeFigureOut">
               <a:rPr lang="zh-CN" altLang="en-US" smtClean="0"/>
-              <a:t>2025/9/9</a:t>
+              <a:t>2025/9/23</a:t>
             </a:fld>
             <a:endParaRPr lang="zh-CN" altLang="en-US"/>
           </a:p>
@@ -2003,7 +2003,7 @@
           <a:p>
             <a:fld id="{B797416A-26F7-4D36-8ACC-1F8188085B70}" type="datetimeFigureOut">
               <a:rPr lang="zh-CN" altLang="en-US" smtClean="0"/>
-              <a:t>2025/9/9</a:t>
+              <a:t>2025/9/23</a:t>
             </a:fld>
             <a:endParaRPr lang="zh-CN" altLang="en-US"/>
           </a:p>
@@ -2173,7 +2173,7 @@
           <a:p>
             <a:fld id="{B797416A-26F7-4D36-8ACC-1F8188085B70}" type="datetimeFigureOut">
               <a:rPr lang="zh-CN" altLang="en-US" smtClean="0"/>
-              <a:t>2025/9/9</a:t>
+              <a:t>2025/9/23</a:t>
             </a:fld>
             <a:endParaRPr lang="zh-CN" altLang="en-US"/>
           </a:p>
@@ -2353,7 +2353,7 @@
           <a:p>
             <a:fld id="{B797416A-26F7-4D36-8ACC-1F8188085B70}" type="datetimeFigureOut">
               <a:rPr lang="zh-CN" altLang="en-US" smtClean="0"/>
-              <a:t>2025/9/9</a:t>
+              <a:t>2025/9/23</a:t>
             </a:fld>
             <a:endParaRPr lang="zh-CN" altLang="en-US"/>
           </a:p>
@@ -2523,7 +2523,7 @@
           <a:p>
             <a:fld id="{B797416A-26F7-4D36-8ACC-1F8188085B70}" type="datetimeFigureOut">
               <a:rPr lang="zh-CN" altLang="en-US" smtClean="0"/>
-              <a:t>2025/9/9</a:t>
+              <a:t>2025/9/23</a:t>
             </a:fld>
             <a:endParaRPr lang="zh-CN" altLang="en-US"/>
           </a:p>
@@ -2767,7 +2767,7 @@
           <a:p>
             <a:fld id="{B797416A-26F7-4D36-8ACC-1F8188085B70}" type="datetimeFigureOut">
               <a:rPr lang="zh-CN" altLang="en-US" smtClean="0"/>
-              <a:t>2025/9/9</a:t>
+              <a:t>2025/9/23</a:t>
             </a:fld>
             <a:endParaRPr lang="zh-CN" altLang="en-US"/>
           </a:p>
@@ -2999,7 +2999,7 @@
           <a:p>
             <a:fld id="{B797416A-26F7-4D36-8ACC-1F8188085B70}" type="datetimeFigureOut">
               <a:rPr lang="zh-CN" altLang="en-US" smtClean="0"/>
-              <a:t>2025/9/9</a:t>
+              <a:t>2025/9/23</a:t>
             </a:fld>
             <a:endParaRPr lang="zh-CN" altLang="en-US"/>
           </a:p>
@@ -3366,7 +3366,7 @@
           <a:p>
             <a:fld id="{B797416A-26F7-4D36-8ACC-1F8188085B70}" type="datetimeFigureOut">
               <a:rPr lang="zh-CN" altLang="en-US" smtClean="0"/>
-              <a:t>2025/9/9</a:t>
+              <a:t>2025/9/23</a:t>
             </a:fld>
             <a:endParaRPr lang="zh-CN" altLang="en-US"/>
           </a:p>
@@ -3484,7 +3484,7 @@
           <a:p>
             <a:fld id="{B797416A-26F7-4D36-8ACC-1F8188085B70}" type="datetimeFigureOut">
               <a:rPr lang="zh-CN" altLang="en-US" smtClean="0"/>
-              <a:t>2025/9/9</a:t>
+              <a:t>2025/9/23</a:t>
             </a:fld>
             <a:endParaRPr lang="zh-CN" altLang="en-US"/>
           </a:p>
@@ -3579,7 +3579,7 @@
           <a:p>
             <a:fld id="{B797416A-26F7-4D36-8ACC-1F8188085B70}" type="datetimeFigureOut">
               <a:rPr lang="zh-CN" altLang="en-US" smtClean="0"/>
-              <a:t>2025/9/9</a:t>
+              <a:t>2025/9/23</a:t>
             </a:fld>
             <a:endParaRPr lang="zh-CN" altLang="en-US"/>
           </a:p>
@@ -3856,7 +3856,7 @@
           <a:p>
             <a:fld id="{B797416A-26F7-4D36-8ACC-1F8188085B70}" type="datetimeFigureOut">
               <a:rPr lang="zh-CN" altLang="en-US" smtClean="0"/>
-              <a:t>2025/9/9</a:t>
+              <a:t>2025/9/23</a:t>
             </a:fld>
             <a:endParaRPr lang="zh-CN" altLang="en-US"/>
           </a:p>
@@ -4113,7 +4113,7 @@
           <a:p>
             <a:fld id="{B797416A-26F7-4D36-8ACC-1F8188085B70}" type="datetimeFigureOut">
               <a:rPr lang="zh-CN" altLang="en-US" smtClean="0"/>
-              <a:t>2025/9/9</a:t>
+              <a:t>2025/9/23</a:t>
             </a:fld>
             <a:endParaRPr lang="zh-CN" altLang="en-US"/>
           </a:p>
@@ -4326,7 +4326,7 @@
           <a:p>
             <a:fld id="{B797416A-26F7-4D36-8ACC-1F8188085B70}" type="datetimeFigureOut">
               <a:rPr lang="zh-CN" altLang="en-US" smtClean="0"/>
-              <a:t>2025/9/9</a:t>
+              <a:t>2025/9/23</a:t>
             </a:fld>
             <a:endParaRPr lang="zh-CN" altLang="en-US"/>
           </a:p>
@@ -7906,8 +7906,8 @@
           </a:p>
         </p:txBody>
       </p:sp>
-      <mc:AlternateContent xmlns:mc="http://schemas.openxmlformats.org/markup-compatibility/2006" xmlns:a14="http://schemas.microsoft.com/office/drawing/2010/main">
-        <mc:Choice Requires="a14">
+      <mc:AlternateContent xmlns:mc="http://schemas.openxmlformats.org/markup-compatibility/2006">
+        <mc:Choice xmlns:a14="http://schemas.microsoft.com/office/drawing/2010/main" Requires="a14">
           <p:sp>
             <p:nvSpPr>
               <p:cNvPr id="3" name="内容占位符 2"/>
@@ -8108,7 +8108,7 @@
                   <a:rPr lang="en-US" altLang="zh-CN" sz="2400" dirty="0">
                     <a:sym typeface="Symbol" panose="05050102010706020507" pitchFamily="18" charset="2"/>
                   </a:rPr>
-                  <a:t>(M) \ {x}</a:t>
+                  <a:t>(M) – {x}</a:t>
                 </a:r>
               </a:p>
               <a:p>
@@ -8267,7 +8267,7 @@
             </p:txBody>
           </p:sp>
         </mc:Choice>
-        <mc:Fallback xmlns="">
+        <mc:Fallback>
           <p:sp>
             <p:nvSpPr>
               <p:cNvPr id="3" name="内容占位符 2"/>

--- a/04_lambda.pptx
+++ b/04_lambda.pptx
@@ -279,7 +279,7 @@
           <a:p>
             <a:fld id="{7952453C-A5FB-4FDE-A708-76FC0F8C47D7}" type="datetimeFigureOut">
               <a:rPr lang="zh-CN" altLang="en-US" smtClean="0"/>
-              <a:t>2025/9/23</a:t>
+              <a:t>2025/9/24</a:t>
             </a:fld>
             <a:endParaRPr lang="zh-CN" altLang="en-US"/>
           </a:p>
@@ -2003,7 +2003,7 @@
           <a:p>
             <a:fld id="{B797416A-26F7-4D36-8ACC-1F8188085B70}" type="datetimeFigureOut">
               <a:rPr lang="zh-CN" altLang="en-US" smtClean="0"/>
-              <a:t>2025/9/23</a:t>
+              <a:t>2025/9/24</a:t>
             </a:fld>
             <a:endParaRPr lang="zh-CN" altLang="en-US"/>
           </a:p>
@@ -2173,7 +2173,7 @@
           <a:p>
             <a:fld id="{B797416A-26F7-4D36-8ACC-1F8188085B70}" type="datetimeFigureOut">
               <a:rPr lang="zh-CN" altLang="en-US" smtClean="0"/>
-              <a:t>2025/9/23</a:t>
+              <a:t>2025/9/24</a:t>
             </a:fld>
             <a:endParaRPr lang="zh-CN" altLang="en-US"/>
           </a:p>
@@ -2353,7 +2353,7 @@
           <a:p>
             <a:fld id="{B797416A-26F7-4D36-8ACC-1F8188085B70}" type="datetimeFigureOut">
               <a:rPr lang="zh-CN" altLang="en-US" smtClean="0"/>
-              <a:t>2025/9/23</a:t>
+              <a:t>2025/9/24</a:t>
             </a:fld>
             <a:endParaRPr lang="zh-CN" altLang="en-US"/>
           </a:p>
@@ -2523,7 +2523,7 @@
           <a:p>
             <a:fld id="{B797416A-26F7-4D36-8ACC-1F8188085B70}" type="datetimeFigureOut">
               <a:rPr lang="zh-CN" altLang="en-US" smtClean="0"/>
-              <a:t>2025/9/23</a:t>
+              <a:t>2025/9/24</a:t>
             </a:fld>
             <a:endParaRPr lang="zh-CN" altLang="en-US"/>
           </a:p>
@@ -2767,7 +2767,7 @@
           <a:p>
             <a:fld id="{B797416A-26F7-4D36-8ACC-1F8188085B70}" type="datetimeFigureOut">
               <a:rPr lang="zh-CN" altLang="en-US" smtClean="0"/>
-              <a:t>2025/9/23</a:t>
+              <a:t>2025/9/24</a:t>
             </a:fld>
             <a:endParaRPr lang="zh-CN" altLang="en-US"/>
           </a:p>
@@ -2999,7 +2999,7 @@
           <a:p>
             <a:fld id="{B797416A-26F7-4D36-8ACC-1F8188085B70}" type="datetimeFigureOut">
               <a:rPr lang="zh-CN" altLang="en-US" smtClean="0"/>
-              <a:t>2025/9/23</a:t>
+              <a:t>2025/9/24</a:t>
             </a:fld>
             <a:endParaRPr lang="zh-CN" altLang="en-US"/>
           </a:p>
@@ -3366,7 +3366,7 @@
           <a:p>
             <a:fld id="{B797416A-26F7-4D36-8ACC-1F8188085B70}" type="datetimeFigureOut">
               <a:rPr lang="zh-CN" altLang="en-US" smtClean="0"/>
-              <a:t>2025/9/23</a:t>
+              <a:t>2025/9/24</a:t>
             </a:fld>
             <a:endParaRPr lang="zh-CN" altLang="en-US"/>
           </a:p>
@@ -3484,7 +3484,7 @@
           <a:p>
             <a:fld id="{B797416A-26F7-4D36-8ACC-1F8188085B70}" type="datetimeFigureOut">
               <a:rPr lang="zh-CN" altLang="en-US" smtClean="0"/>
-              <a:t>2025/9/23</a:t>
+              <a:t>2025/9/24</a:t>
             </a:fld>
             <a:endParaRPr lang="zh-CN" altLang="en-US"/>
           </a:p>
@@ -3579,7 +3579,7 @@
           <a:p>
             <a:fld id="{B797416A-26F7-4D36-8ACC-1F8188085B70}" type="datetimeFigureOut">
               <a:rPr lang="zh-CN" altLang="en-US" smtClean="0"/>
-              <a:t>2025/9/23</a:t>
+              <a:t>2025/9/24</a:t>
             </a:fld>
             <a:endParaRPr lang="zh-CN" altLang="en-US"/>
           </a:p>
@@ -3856,7 +3856,7 @@
           <a:p>
             <a:fld id="{B797416A-26F7-4D36-8ACC-1F8188085B70}" type="datetimeFigureOut">
               <a:rPr lang="zh-CN" altLang="en-US" smtClean="0"/>
-              <a:t>2025/9/23</a:t>
+              <a:t>2025/9/24</a:t>
             </a:fld>
             <a:endParaRPr lang="zh-CN" altLang="en-US"/>
           </a:p>
@@ -4113,7 +4113,7 @@
           <a:p>
             <a:fld id="{B797416A-26F7-4D36-8ACC-1F8188085B70}" type="datetimeFigureOut">
               <a:rPr lang="zh-CN" altLang="en-US" smtClean="0"/>
-              <a:t>2025/9/23</a:t>
+              <a:t>2025/9/24</a:t>
             </a:fld>
             <a:endParaRPr lang="zh-CN" altLang="en-US"/>
           </a:p>
@@ -4326,7 +4326,7 @@
           <a:p>
             <a:fld id="{B797416A-26F7-4D36-8ACC-1F8188085B70}" type="datetimeFigureOut">
               <a:rPr lang="zh-CN" altLang="en-US" smtClean="0"/>
-              <a:t>2025/9/23</a:t>
+              <a:t>2025/9/24</a:t>
             </a:fld>
             <a:endParaRPr lang="zh-CN" altLang="en-US"/>
           </a:p>
@@ -7906,8 +7906,8 @@
           </a:p>
         </p:txBody>
       </p:sp>
-      <mc:AlternateContent xmlns:mc="http://schemas.openxmlformats.org/markup-compatibility/2006">
-        <mc:Choice xmlns:a14="http://schemas.microsoft.com/office/drawing/2010/main" Requires="a14">
+      <mc:AlternateContent xmlns:mc="http://schemas.openxmlformats.org/markup-compatibility/2006" xmlns:a14="http://schemas.microsoft.com/office/drawing/2010/main">
+        <mc:Choice Requires="a14">
           <p:sp>
             <p:nvSpPr>
               <p:cNvPr id="3" name="内容占位符 2"/>
@@ -8267,7 +8267,7 @@
             </p:txBody>
           </p:sp>
         </mc:Choice>
-        <mc:Fallback>
+        <mc:Fallback xmlns="">
           <p:sp>
             <p:nvSpPr>
               <p:cNvPr id="3" name="内容占位符 2"/>
@@ -36056,6 +36056,165 @@
           </p:sp>
         </mc:Fallback>
       </mc:AlternateContent>
+      <p:sp>
+        <p:nvSpPr>
+          <p:cNvPr id="4" name="圆角矩形标注 3">
+            <a:extLst>
+              <a:ext uri="{FF2B5EF4-FFF2-40B4-BE49-F238E27FC236}">
+                <a16:creationId xmlns:a16="http://schemas.microsoft.com/office/drawing/2014/main" id="{9D678910-1D2D-4BAC-8A0F-6E268C5A3482}"/>
+              </a:ext>
+            </a:extLst>
+          </p:cNvPr>
+          <p:cNvSpPr/>
+          <p:nvPr/>
+        </p:nvSpPr>
+        <p:spPr>
+          <a:xfrm>
+            <a:off x="3876935" y="3328314"/>
+            <a:ext cx="4743611" cy="941307"/>
+          </a:xfrm>
+          <a:prstGeom prst="wedgeRoundRectCallout">
+            <a:avLst>
+              <a:gd name="adj1" fmla="val -61106"/>
+              <a:gd name="adj2" fmla="val 21850"/>
+              <a:gd name="adj3" fmla="val 16667"/>
+            </a:avLst>
+          </a:prstGeom>
+          <a:noFill/>
+          <a:ln w="19050">
+            <a:solidFill>
+              <a:srgbClr val="FF0000"/>
+            </a:solidFill>
+          </a:ln>
+        </p:spPr>
+        <p:style>
+          <a:lnRef idx="2">
+            <a:schemeClr val="accent1">
+              <a:shade val="50000"/>
+            </a:schemeClr>
+          </a:lnRef>
+          <a:fillRef idx="1">
+            <a:schemeClr val="accent1"/>
+          </a:fillRef>
+          <a:effectRef idx="0">
+            <a:schemeClr val="accent1"/>
+          </a:effectRef>
+          <a:fontRef idx="minor">
+            <a:schemeClr val="lt1"/>
+          </a:fontRef>
+        </p:style>
+        <p:txBody>
+          <a:bodyPr rtlCol="0" anchor="ctr"/>
+          <a:lstStyle/>
+          <a:p>
+            <a:r>
+              <a:rPr lang="en-US" altLang="zh-CN" sz="2400" dirty="0">
+                <a:solidFill>
+                  <a:schemeClr val="tx1"/>
+                </a:solidFill>
+                <a:sym typeface="Symbol" panose="05050102010706020507" pitchFamily="18" charset="2"/>
+              </a:rPr>
+              <a:t>this denotes  f. x. f ( f ( …. ( f x) …))</a:t>
+            </a:r>
+          </a:p>
+          <a:p>
+            <a:endParaRPr lang="en-US" altLang="zh-CN" sz="2400" dirty="0">
+              <a:solidFill>
+                <a:schemeClr val="tx1"/>
+              </a:solidFill>
+              <a:sym typeface="Symbol" panose="05050102010706020507" pitchFamily="18" charset="2"/>
+            </a:endParaRPr>
+          </a:p>
+        </p:txBody>
+      </p:sp>
+      <p:sp>
+        <p:nvSpPr>
+          <p:cNvPr id="5" name="左大括号 4">
+            <a:extLst>
+              <a:ext uri="{FF2B5EF4-FFF2-40B4-BE49-F238E27FC236}">
+                <a16:creationId xmlns:a16="http://schemas.microsoft.com/office/drawing/2014/main" id="{9C5BA5A1-086E-4CA7-A38E-3CF0487F51E7}"/>
+              </a:ext>
+            </a:extLst>
+          </p:cNvPr>
+          <p:cNvSpPr/>
+          <p:nvPr/>
+        </p:nvSpPr>
+        <p:spPr>
+          <a:xfrm rot="16200000">
+            <a:off x="7036291" y="3242862"/>
+            <a:ext cx="183002" cy="1248761"/>
+          </a:xfrm>
+          <a:prstGeom prst="leftBrace">
+            <a:avLst>
+              <a:gd name="adj1" fmla="val 28205"/>
+              <a:gd name="adj2" fmla="val 47727"/>
+            </a:avLst>
+          </a:prstGeom>
+          <a:ln>
+            <a:solidFill>
+              <a:schemeClr val="tx1"/>
+            </a:solidFill>
+          </a:ln>
+        </p:spPr>
+        <p:style>
+          <a:lnRef idx="1">
+            <a:schemeClr val="accent1"/>
+          </a:lnRef>
+          <a:fillRef idx="0">
+            <a:schemeClr val="accent1"/>
+          </a:fillRef>
+          <a:effectRef idx="0">
+            <a:schemeClr val="accent1"/>
+          </a:effectRef>
+          <a:fontRef idx="minor">
+            <a:schemeClr val="tx1"/>
+          </a:fontRef>
+        </p:style>
+        <p:txBody>
+          <a:bodyPr rtlCol="0" anchor="ctr"/>
+          <a:lstStyle/>
+          <a:p>
+            <a:pPr algn="ctr"/>
+            <a:endParaRPr lang="zh-CN" altLang="en-US"/>
+          </a:p>
+        </p:txBody>
+      </p:sp>
+      <p:sp>
+        <p:nvSpPr>
+          <p:cNvPr id="6" name="文本框 5">
+            <a:extLst>
+              <a:ext uri="{FF2B5EF4-FFF2-40B4-BE49-F238E27FC236}">
+                <a16:creationId xmlns:a16="http://schemas.microsoft.com/office/drawing/2014/main" id="{C2E4CD22-7D7B-4832-8739-ED13FAC8E151}"/>
+              </a:ext>
+            </a:extLst>
+          </p:cNvPr>
+          <p:cNvSpPr txBox="1"/>
+          <p:nvPr/>
+        </p:nvSpPr>
+        <p:spPr>
+          <a:xfrm>
+            <a:off x="6744589" y="3958744"/>
+            <a:ext cx="878767" cy="369332"/>
+          </a:xfrm>
+          <a:prstGeom prst="rect">
+            <a:avLst/>
+          </a:prstGeom>
+          <a:noFill/>
+        </p:spPr>
+        <p:txBody>
+          <a:bodyPr wrap="none" rtlCol="0">
+            <a:spAutoFit/>
+          </a:bodyPr>
+          <a:lstStyle/>
+          <a:p>
+            <a:r>
+              <a:rPr lang="en-US" altLang="zh-CN" dirty="0"/>
+              <a:t>n times</a:t>
+            </a:r>
+            <a:endParaRPr lang="zh-CN" altLang="en-US" dirty="0"/>
+          </a:p>
+        </p:txBody>
+      </p:sp>
     </p:spTree>
     <p:extLst>
       <p:ext uri="{BB962C8B-B14F-4D97-AF65-F5344CB8AC3E}">
